--- a/UNIDAD 4/Act- 4.2- LYAI1- Reporte de práctica-Amaury Gordillo.pptx
+++ b/UNIDAD 4/Act- 4.2- LYAI1- Reporte de práctica-Amaury Gordillo.pptx
@@ -5,7 +5,7 @@
     <p:sldMasterId id="2147483648" r:id="rId1"/>
   </p:sldMasterIdLst>
   <p:notesMasterIdLst>
-    <p:notesMasterId r:id="rId13"/>
+    <p:notesMasterId r:id="rId14"/>
   </p:notesMasterIdLst>
   <p:sldIdLst>
     <p:sldId id="256" r:id="rId2"/>
@@ -18,34 +18,35 @@
     <p:sldId id="263" r:id="rId9"/>
     <p:sldId id="264" r:id="rId10"/>
     <p:sldId id="265" r:id="rId11"/>
-    <p:sldId id="266" r:id="rId12"/>
+    <p:sldId id="267" r:id="rId12"/>
+    <p:sldId id="266" r:id="rId13"/>
   </p:sldIdLst>
   <p:sldSz cx="18288000" cy="10287000"/>
   <p:notesSz cx="6858000" cy="9144000"/>
   <p:embeddedFontLst>
     <p:embeddedFont>
       <p:font typeface="Arimo" panose="020B0604020202020204" charset="0"/>
-      <p:regular r:id="rId14"/>
+      <p:regular r:id="rId15"/>
     </p:embeddedFont>
     <p:embeddedFont>
       <p:font typeface="Arimo Bold" panose="020B0604020202020204" charset="0"/>
-      <p:regular r:id="rId15"/>
+      <p:regular r:id="rId16"/>
     </p:embeddedFont>
     <p:embeddedFont>
       <p:font typeface="Arimo Italics" panose="020B0604020202020204" charset="0"/>
-      <p:regular r:id="rId16"/>
+      <p:regular r:id="rId17"/>
     </p:embeddedFont>
     <p:embeddedFont>
       <p:font typeface="Consolas" panose="020B0609020204030204" pitchFamily="49" charset="0"/>
-      <p:regular r:id="rId17"/>
-      <p:bold r:id="rId18"/>
-      <p:italic r:id="rId19"/>
-      <p:boldItalic r:id="rId20"/>
+      <p:regular r:id="rId18"/>
+      <p:bold r:id="rId19"/>
+      <p:italic r:id="rId20"/>
+      <p:boldItalic r:id="rId21"/>
     </p:embeddedFont>
     <p:embeddedFont>
       <p:font typeface="Montserrat Bold" panose="00000800000000000000" pitchFamily="2" charset="0"/>
-      <p:regular r:id="rId21"/>
-      <p:bold r:id="rId22"/>
+      <p:regular r:id="rId22"/>
+      <p:bold r:id="rId23"/>
     </p:embeddedFont>
   </p:embeddedFontLst>
   <p:defaultTextStyle>
@@ -244,7 +245,7 @@
           <a:p>
             <a:fld id="{B7268E1E-0E44-426D-905E-8AD9B19D2182}" type="datetimeFigureOut">
               <a:rPr lang="cs-CZ" smtClean="0"/>
-              <a:t>15.03.2026</a:t>
+              <a:t>18.03.2026</a:t>
             </a:fld>
             <a:endParaRPr lang="cs-CZ"/>
           </a:p>
@@ -1042,6 +1043,229 @@
         </p:nvSpPr>
         <p:spPr>
           <a:xfrm>
+            <a:off x="2290763" y="512763"/>
+            <a:ext cx="4562475" cy="2566987"/>
+          </a:xfrm>
+          <a:prstGeom prst="rect">
+            <a:avLst/>
+          </a:prstGeom>
+          <a:noFill/>
+          <a:ln w="12700">
+            <a:solidFill>
+              <a:prstClr val="black"/>
+            </a:solidFill>
+          </a:ln>
+        </p:spPr>
+        <p:txBody>
+          <a:bodyPr vert="horz" lIns="91440" tIns="45720" rIns="91440" bIns="45720" rtlCol="0" anchor="ctr"/>
+          <a:lstStyle/>
+          <a:p>
+            <a:endParaRPr/>
+          </a:p>
+        </p:txBody>
+      </p:sp>
+      <p:sp>
+        <p:nvSpPr>
+          <p:cNvPr id="5" name="Notes Placeholder 4"/>
+          <p:cNvSpPr>
+            <a:spLocks noGrp="1"/>
+          </p:cNvSpPr>
+          <p:nvPr>
+            <p:ph type="body" sz="quarter" idx="3"/>
+          </p:nvPr>
+        </p:nvSpPr>
+        <p:spPr>
+          <a:xfrm>
+            <a:off x="914400" y="3251200"/>
+            <a:ext cx="7315200" cy="3081338"/>
+          </a:xfrm>
+          <a:prstGeom prst="rect">
+            <a:avLst/>
+          </a:prstGeom>
+        </p:spPr>
+        <p:txBody>
+          <a:bodyPr vert="horz" lIns="91440" tIns="45720" rIns="91440" bIns="45720" rtlCol="0"/>
+          <a:lstStyle/>
+          <a:p>
+            <a:r>
+              <a:rPr lang="en-US"/>
+              <a:t>8</a:t>
+            </a:r>
+          </a:p>
+        </p:txBody>
+      </p:sp>
+      <p:sp>
+        <p:nvSpPr>
+          <p:cNvPr id="6" name="Footer Placeholder 5"/>
+          <p:cNvSpPr>
+            <a:spLocks noGrp="1"/>
+          </p:cNvSpPr>
+          <p:nvPr>
+            <p:ph type="ftr" sz="quarter" idx="4"/>
+          </p:nvPr>
+        </p:nvSpPr>
+        <p:spPr>
+          <a:xfrm>
+            <a:off x="0" y="6502400"/>
+            <a:ext cx="3962400" cy="341313"/>
+          </a:xfrm>
+          <a:prstGeom prst="rect">
+            <a:avLst/>
+          </a:prstGeom>
+        </p:spPr>
+        <p:txBody>
+          <a:bodyPr vert="horz" lIns="91440" tIns="45720" rIns="91440" bIns="45720" rtlCol="0" anchor="b"/>
+          <a:lstStyle>
+            <a:lvl1pPr algn="l">
+              <a:defRPr sz="1200"/>
+            </a:lvl1pPr>
+          </a:lstStyle>
+          <a:p>
+            <a:endParaRPr/>
+          </a:p>
+        </p:txBody>
+      </p:sp>
+      <p:sp>
+        <p:nvSpPr>
+          <p:cNvPr id="7" name="Slide Number Placeholder 6"/>
+          <p:cNvSpPr>
+            <a:spLocks noGrp="1"/>
+          </p:cNvSpPr>
+          <p:nvPr>
+            <p:ph type="sldNum" sz="quarter" idx="5"/>
+          </p:nvPr>
+        </p:nvSpPr>
+        <p:spPr>
+          <a:xfrm>
+            <a:off x="5180013" y="6502400"/>
+            <a:ext cx="3962400" cy="341313"/>
+          </a:xfrm>
+          <a:prstGeom prst="rect">
+            <a:avLst/>
+          </a:prstGeom>
+        </p:spPr>
+        <p:txBody>
+          <a:bodyPr vert="horz" lIns="91440" tIns="45720" rIns="91440" bIns="45720" rtlCol="0" anchor="b"/>
+          <a:lstStyle>
+            <a:lvl1pPr algn="r">
+              <a:defRPr sz="1200"/>
+            </a:lvl1pPr>
+          </a:lstStyle>
+          <a:p>
+            <a:r>
+              <a:rPr lang="cs-CZ"/>
+              <a:t>‹#›</a:t>
+            </a:r>
+          </a:p>
+        </p:txBody>
+      </p:sp>
+    </p:spTree>
+    <p:extLst>
+      <p:ext uri="{BB962C8B-B14F-4D97-AF65-F5344CB8AC3E}">
+        <p14:creationId xmlns:p14="http://schemas.microsoft.com/office/powerpoint/2010/main" val="945773721"/>
+      </p:ext>
+    </p:extLst>
+  </p:cSld>
+  <p:clrMapOvr>
+    <a:masterClrMapping/>
+  </p:clrMapOvr>
+</p:notes>
+</file>
+
+<file path=ppt/notesSlides/notesSlide12.xml><?xml version="1.0" encoding="utf-8"?>
+<p:notes xmlns:a="http://schemas.openxmlformats.org/drawingml/2006/main" xmlns:r="http://schemas.openxmlformats.org/officeDocument/2006/relationships" xmlns:p="http://schemas.openxmlformats.org/presentationml/2006/main">
+  <p:cSld>
+    <p:spTree>
+      <p:nvGrpSpPr>
+        <p:cNvPr id="1" name=""/>
+        <p:cNvGrpSpPr/>
+        <p:nvPr/>
+      </p:nvGrpSpPr>
+      <p:grpSpPr>
+        <a:xfrm>
+          <a:off x="0" y="0"/>
+          <a:ext cx="0" cy="0"/>
+          <a:chOff x="0" y="0"/>
+          <a:chExt cx="0" cy="0"/>
+        </a:xfrm>
+      </p:grpSpPr>
+      <p:sp>
+        <p:nvSpPr>
+          <p:cNvPr id="2" name="Header Placeholder 1"/>
+          <p:cNvSpPr>
+            <a:spLocks noGrp="1"/>
+          </p:cNvSpPr>
+          <p:nvPr>
+            <p:ph type="hdr" sz="quarter"/>
+          </p:nvPr>
+        </p:nvSpPr>
+        <p:spPr>
+          <a:xfrm>
+            <a:off x="0" y="0"/>
+            <a:ext cx="3962400" cy="342900"/>
+          </a:xfrm>
+          <a:prstGeom prst="rect">
+            <a:avLst/>
+          </a:prstGeom>
+        </p:spPr>
+        <p:txBody>
+          <a:bodyPr vert="horz" lIns="91440" tIns="45720" rIns="91440" bIns="45720" rtlCol="0"/>
+          <a:lstStyle>
+            <a:lvl1pPr algn="l">
+              <a:defRPr sz="1200"/>
+            </a:lvl1pPr>
+          </a:lstStyle>
+          <a:p>
+            <a:endParaRPr/>
+          </a:p>
+        </p:txBody>
+      </p:sp>
+      <p:sp>
+        <p:nvSpPr>
+          <p:cNvPr id="3" name="Date Placeholder 2"/>
+          <p:cNvSpPr>
+            <a:spLocks noGrp="1"/>
+          </p:cNvSpPr>
+          <p:nvPr>
+            <p:ph type="dt" idx="1"/>
+          </p:nvPr>
+        </p:nvSpPr>
+        <p:spPr>
+          <a:xfrm>
+            <a:off x="5180013" y="0"/>
+            <a:ext cx="3962400" cy="342900"/>
+          </a:xfrm>
+          <a:prstGeom prst="rect">
+            <a:avLst/>
+          </a:prstGeom>
+        </p:spPr>
+        <p:txBody>
+          <a:bodyPr vert="horz" lIns="91440" tIns="45720" rIns="91440" bIns="45720" rtlCol="0"/>
+          <a:lstStyle>
+            <a:lvl1pPr algn="r">
+              <a:defRPr sz="1200"/>
+            </a:lvl1pPr>
+          </a:lstStyle>
+          <a:p>
+            <a:r>
+              <a:rPr lang="cs-CZ"/>
+              <a:t>1.7.2013</a:t>
+            </a:r>
+          </a:p>
+        </p:txBody>
+      </p:sp>
+      <p:sp>
+        <p:nvSpPr>
+          <p:cNvPr id="4" name="Slide Image Placeholder 3"/>
+          <p:cNvSpPr>
+            <a:spLocks noGrp="1" noRot="1" noChangeAspect="1"/>
+          </p:cNvSpPr>
+          <p:nvPr>
+            <p:ph type="sldImg" idx="2"/>
+          </p:nvPr>
+        </p:nvSpPr>
+        <p:spPr>
+          <a:xfrm>
             <a:off x="2857500" y="512763"/>
             <a:ext cx="3429000" cy="2566987"/>
           </a:xfrm>
@@ -3090,7 +3314,7 @@
             <a:fld id="{1D8BD707-D9CF-40AE-B4C6-C98DA3205C09}" type="datetimeFigureOut">
               <a:rPr lang="en-US" smtClean="0"/>
               <a:pPr/>
-              <a:t>3/15/2026</a:t>
+              <a:t>3/18/2026</a:t>
             </a:fld>
             <a:endParaRPr lang="en-US"/>
           </a:p>
@@ -3255,7 +3479,7 @@
             <a:fld id="{1D8BD707-D9CF-40AE-B4C6-C98DA3205C09}" type="datetimeFigureOut">
               <a:rPr lang="en-US" smtClean="0"/>
               <a:pPr/>
-              <a:t>3/15/2026</a:t>
+              <a:t>3/18/2026</a:t>
             </a:fld>
             <a:endParaRPr lang="en-US"/>
           </a:p>
@@ -3430,7 +3654,7 @@
             <a:fld id="{1D8BD707-D9CF-40AE-B4C6-C98DA3205C09}" type="datetimeFigureOut">
               <a:rPr lang="en-US" smtClean="0"/>
               <a:pPr/>
-              <a:t>3/15/2026</a:t>
+              <a:t>3/18/2026</a:t>
             </a:fld>
             <a:endParaRPr lang="en-US"/>
           </a:p>
@@ -3595,7 +3819,7 @@
             <a:fld id="{1D8BD707-D9CF-40AE-B4C6-C98DA3205C09}" type="datetimeFigureOut">
               <a:rPr lang="en-US" smtClean="0"/>
               <a:pPr/>
-              <a:t>3/15/2026</a:t>
+              <a:t>3/18/2026</a:t>
             </a:fld>
             <a:endParaRPr lang="en-US"/>
           </a:p>
@@ -3837,7 +4061,7 @@
             <a:fld id="{1D8BD707-D9CF-40AE-B4C6-C98DA3205C09}" type="datetimeFigureOut">
               <a:rPr lang="en-US" smtClean="0"/>
               <a:pPr/>
-              <a:t>3/15/2026</a:t>
+              <a:t>3/18/2026</a:t>
             </a:fld>
             <a:endParaRPr lang="en-US"/>
           </a:p>
@@ -4119,7 +4343,7 @@
             <a:fld id="{1D8BD707-D9CF-40AE-B4C6-C98DA3205C09}" type="datetimeFigureOut">
               <a:rPr lang="en-US" smtClean="0"/>
               <a:pPr/>
-              <a:t>3/15/2026</a:t>
+              <a:t>3/18/2026</a:t>
             </a:fld>
             <a:endParaRPr lang="en-US"/>
           </a:p>
@@ -4535,7 +4759,7 @@
             <a:fld id="{1D8BD707-D9CF-40AE-B4C6-C98DA3205C09}" type="datetimeFigureOut">
               <a:rPr lang="en-US" smtClean="0"/>
               <a:pPr/>
-              <a:t>3/15/2026</a:t>
+              <a:t>3/18/2026</a:t>
             </a:fld>
             <a:endParaRPr lang="en-US"/>
           </a:p>
@@ -4649,7 +4873,7 @@
             <a:fld id="{1D8BD707-D9CF-40AE-B4C6-C98DA3205C09}" type="datetimeFigureOut">
               <a:rPr lang="en-US" smtClean="0"/>
               <a:pPr/>
-              <a:t>3/15/2026</a:t>
+              <a:t>3/18/2026</a:t>
             </a:fld>
             <a:endParaRPr lang="en-US"/>
           </a:p>
@@ -4741,7 +4965,7 @@
             <a:fld id="{1D8BD707-D9CF-40AE-B4C6-C98DA3205C09}" type="datetimeFigureOut">
               <a:rPr lang="en-US" smtClean="0"/>
               <a:pPr/>
-              <a:t>3/15/2026</a:t>
+              <a:t>3/18/2026</a:t>
             </a:fld>
             <a:endParaRPr lang="en-US"/>
           </a:p>
@@ -5013,7 +5237,7 @@
             <a:fld id="{1D8BD707-D9CF-40AE-B4C6-C98DA3205C09}" type="datetimeFigureOut">
               <a:rPr lang="en-US" smtClean="0"/>
               <a:pPr/>
-              <a:t>3/15/2026</a:t>
+              <a:t>3/18/2026</a:t>
             </a:fld>
             <a:endParaRPr lang="en-US"/>
           </a:p>
@@ -5262,7 +5486,7 @@
             <a:fld id="{1D8BD707-D9CF-40AE-B4C6-C98DA3205C09}" type="datetimeFigureOut">
               <a:rPr lang="en-US" smtClean="0"/>
               <a:pPr/>
-              <a:t>3/15/2026</a:t>
+              <a:t>3/18/2026</a:t>
             </a:fld>
             <a:endParaRPr lang="en-US"/>
           </a:p>
@@ -5470,7 +5694,7 @@
             <a:fld id="{1D8BD707-D9CF-40AE-B4C6-C98DA3205C09}" type="datetimeFigureOut">
               <a:rPr lang="en-US" smtClean="0"/>
               <a:pPr/>
-              <a:t>3/15/2026</a:t>
+              <a:t>3/18/2026</a:t>
             </a:fld>
             <a:endParaRPr lang="en-US"/>
           </a:p>
@@ -6533,6 +6757,142 @@
 </file>
 
 <file path=ppt/slides/slide11.xml><?xml version="1.0" encoding="utf-8"?>
+<p:sld xmlns:a="http://schemas.openxmlformats.org/drawingml/2006/main" xmlns:r="http://schemas.openxmlformats.org/officeDocument/2006/relationships" xmlns:p="http://schemas.openxmlformats.org/presentationml/2006/main">
+  <p:cSld>
+    <p:spTree>
+      <p:nvGrpSpPr>
+        <p:cNvPr id="1" name=""/>
+        <p:cNvGrpSpPr/>
+        <p:nvPr/>
+      </p:nvGrpSpPr>
+      <p:grpSpPr>
+        <a:xfrm>
+          <a:off x="0" y="0"/>
+          <a:ext cx="0" cy="0"/>
+          <a:chOff x="0" y="0"/>
+          <a:chExt cx="0" cy="0"/>
+        </a:xfrm>
+      </p:grpSpPr>
+      <p:sp>
+        <p:nvSpPr>
+          <p:cNvPr id="33" name="TextBox 33"/>
+          <p:cNvSpPr txBox="1"/>
+          <p:nvPr/>
+        </p:nvSpPr>
+        <p:spPr>
+          <a:xfrm>
+            <a:off x="619705" y="300628"/>
+            <a:ext cx="8337976" cy="500650"/>
+          </a:xfrm>
+          <a:prstGeom prst="rect">
+            <a:avLst/>
+          </a:prstGeom>
+        </p:spPr>
+        <p:txBody>
+          <a:bodyPr wrap="square" lIns="0" tIns="0" rIns="0" bIns="0" rtlCol="0" anchor="t">
+            <a:spAutoFit/>
+          </a:bodyPr>
+          <a:lstStyle/>
+          <a:p>
+            <a:pPr algn="l">
+              <a:lnSpc>
+                <a:spcPts val="4187"/>
+              </a:lnSpc>
+            </a:pPr>
+            <a:r>
+              <a:rPr lang="en-US" sz="3312" b="1" dirty="0">
+                <a:solidFill>
+                  <a:srgbClr val="505468"/>
+                </a:solidFill>
+                <a:latin typeface="Arimo Bold"/>
+                <a:ea typeface="Arimo Bold"/>
+                <a:cs typeface="Arimo Bold"/>
+                <a:sym typeface="Arimo Bold"/>
+              </a:rPr>
+              <a:t>Link de </a:t>
+            </a:r>
+            <a:r>
+              <a:rPr lang="en-US" sz="3312" b="1" dirty="0" err="1">
+                <a:solidFill>
+                  <a:srgbClr val="505468"/>
+                </a:solidFill>
+                <a:latin typeface="Arimo Bold"/>
+                <a:ea typeface="Arimo Bold"/>
+                <a:cs typeface="Arimo Bold"/>
+                <a:sym typeface="Arimo Bold"/>
+              </a:rPr>
+              <a:t>Repositorio</a:t>
+            </a:r>
+            <a:r>
+              <a:rPr lang="en-US" sz="3312" b="1" dirty="0">
+                <a:solidFill>
+                  <a:srgbClr val="505468"/>
+                </a:solidFill>
+                <a:latin typeface="Arimo Bold"/>
+                <a:ea typeface="Arimo Bold"/>
+                <a:cs typeface="Arimo Bold"/>
+                <a:sym typeface="Arimo Bold"/>
+              </a:rPr>
+              <a:t> </a:t>
+            </a:r>
+          </a:p>
+        </p:txBody>
+      </p:sp>
+      <p:sp>
+        <p:nvSpPr>
+          <p:cNvPr id="65" name="CuadroTexto 64">
+            <a:extLst>
+              <a:ext uri="{FF2B5EF4-FFF2-40B4-BE49-F238E27FC236}">
+                <a16:creationId xmlns:a16="http://schemas.microsoft.com/office/drawing/2014/main" id="{4B9366A9-73F0-5EDD-2C82-C952BF0D867D}"/>
+              </a:ext>
+            </a:extLst>
+          </p:cNvPr>
+          <p:cNvSpPr txBox="1"/>
+          <p:nvPr/>
+        </p:nvSpPr>
+        <p:spPr>
+          <a:xfrm>
+            <a:off x="619704" y="1181100"/>
+            <a:ext cx="17439696" cy="954107"/>
+          </a:xfrm>
+          <a:prstGeom prst="rect">
+            <a:avLst/>
+          </a:prstGeom>
+          <a:noFill/>
+        </p:spPr>
+        <p:txBody>
+          <a:bodyPr wrap="square">
+            <a:spAutoFit/>
+          </a:bodyPr>
+          <a:lstStyle/>
+          <a:p>
+            <a:r>
+              <a:rPr lang="es-MX" sz="2800" dirty="0">
+                <a:hlinkClick r:id="rId3"/>
+              </a:rPr>
+              <a:t>https://github.com/amaurycolochos-cpu/LENGUAJES-Y-AUTOMATAS-1/tree/main/UNIDAD%204/AnalizadorLexicoFX</a:t>
+            </a:r>
+            <a:endParaRPr lang="es-MX" sz="2800" dirty="0"/>
+          </a:p>
+          <a:p>
+            <a:endParaRPr lang="es-MX" sz="2800" dirty="0"/>
+          </a:p>
+        </p:txBody>
+      </p:sp>
+    </p:spTree>
+    <p:extLst>
+      <p:ext uri="{BB962C8B-B14F-4D97-AF65-F5344CB8AC3E}">
+        <p14:creationId xmlns:p14="http://schemas.microsoft.com/office/powerpoint/2010/main" val="2189507563"/>
+      </p:ext>
+    </p:extLst>
+  </p:cSld>
+  <p:clrMapOvr>
+    <a:masterClrMapping/>
+  </p:clrMapOvr>
+</p:sld>
+</file>
+
+<file path=ppt/slides/slide12.xml><?xml version="1.0" encoding="utf-8"?>
 <p:sld xmlns:a="http://schemas.openxmlformats.org/drawingml/2006/main" xmlns:r="http://schemas.openxmlformats.org/officeDocument/2006/relationships" xmlns:p="http://schemas.openxmlformats.org/presentationml/2006/main">
   <p:cSld>
     <p:spTree>
